--- a/decks/combined-circuits/combined-circuits_ch6_parallel-circuits.pptx
+++ b/decks/combined-circuits/combined-circuits_ch6_parallel-circuits.pptx
@@ -123,28 +123,28 @@
   <p:extLst>
     <p:ext uri="{521415D9-36F7-43E2-AB2F-B90AF26B5E84}">
       <p14:sectionLst xmlns:p14="http://schemas.microsoft.com/office/powerpoint/2010/main">
-        <p14:section name="Opening" id="{2d13946c-83f3-c7b7-9b9b-effbcf5975ec}">
+        <p14:section name="Opening" id="{50d74aec-602d-99d5-8f46-a721eed23119}">
           <p14:sldIdLst>
             <p14:sldId id="256"/>
           </p14:sldIdLst>
         </p14:section>
-        <p14:section name="Gate" id="{40df19a5-b470-f7f4-8eea-aa80fc5253c9}">
+        <p14:section name="Gate" id="{196e1b22-1a08-4535-1387-777f16868145}">
           <p14:sldIdLst>
             <p14:sldId id="257"/>
             <p14:sldId id="258"/>
           </p14:sldIdLst>
         </p14:section>
-        <p14:section name="Pre-teach" id="{15d3f0ba-a241-392d-a91e-c868d8a315e0}">
+        <p14:section name="Pre-teach" id="{4cc60b88-aaac-f09e-2b97-e6a4b8c7507b}">
           <p14:sldIdLst>
             <p14:sldId id="259"/>
           </p14:sldIdLst>
         </p14:section>
-        <p14:section name="Read-along" id="{07657236-fd0e-104e-5d5d-6f34dc4d0d1e}">
+        <p14:section name="Read-along" id="{8f15987a-bd58-b2c5-e21e-fb204302967e}">
           <p14:sldIdLst>
             <p14:sldId id="260"/>
           </p14:sldIdLst>
         </p14:section>
-        <p14:section name="Teach" id="{5b6d3b82-117b-16d9-e7e8-9e7cec1d75a8}">
+        <p14:section name="Teach" id="{f37a4cd4-f380-eda4-f2ca-a458c7e4701f}">
           <p14:sldIdLst>
             <p14:sldId id="261"/>
             <p14:sldId id="262"/>
@@ -153,19 +153,19 @@
             <p14:sldId id="265"/>
           </p14:sldIdLst>
         </p14:section>
-        <p14:section name="Routes" id="{3a28e404-177e-2dd4-4df0-cc955b42de81}">
+        <p14:section name="Routes" id="{56a3c79a-103d-bad3-635a-6dc3f53874e6}">
           <p14:sldIdLst>
             <p14:sldId id="266"/>
             <p14:sldId id="267"/>
             <p14:sldId id="268"/>
           </p14:sldIdLst>
         </p14:section>
-        <p14:section name="Close" id="{859a82bb-6b8f-bda9-17d0-b36a0943a45c}">
+        <p14:section name="Close" id="{c7797d37-15fc-1927-d26a-e563046a2f47}">
           <p14:sldIdLst>
             <p14:sldId id="269"/>
           </p14:sldIdLst>
         </p14:section>
-        <p14:section name="Answers" id="{4f03c6e8-2aec-27c2-2aa4-7bf81d94f950}">
+        <p14:section name="Answers" id="{420c60cb-2a5f-52c8-bb0e-8fc515b3d848}">
           <p14:sldIdLst>
             <p14:sldId id="270"/>
             <p14:sldId id="271"/>
@@ -1409,7 +1409,7 @@
               <a:rPr lang="en-US" dirty="0"/>
               <a:t>Do now — retrieval. Silent, no notes, no help: recall comes before any support. Give about four minutes.
 1. In a parallel circuit, the p.d. across each branch is ___ the supply p.d.  →  the same as
-2. Two branches of a parallel circuit carry 0.40 A and 0.60 A. What is the current from the supply?  →  C   1.0 A
+2. Two branches of a parallel circuit carry 0.40 A and 0.60 A. What is the current from the supply?  →  A   1.0 A
 3. The supply current in a parallel circuit is 2.5 A. One branch carries 1.5 A. Calculate the current in the other branch, in amps.  →  1 A
 Circulate: who gets 3/3 (Stretch route), 2/3 (Core), 0–1 (Support)? Use this to route pupils later in the lesson.</a:t>
             </a:r>
@@ -1501,7 +1501,7 @@
               <a:rPr lang="en-US" dirty="0"/>
               <a:t>Answers — pupils mark their own in a different colour, then hands up for 3/3, 2/3, 1/3.
 1. the same as. Each branch is connected straight across the supply, so it has the full supply p.d.
-2. C   1.0 A. The branch currents add up: 0.40 + 0.60 = 1.0 A.
+2. A   1.0 A. The branch currents add up: 0.40 + 0.60 = 1.0 A.
 3. 1 A. The branch currents add up to the supply current: 2.5 − 1.5 = 1.0 A (2 s.f.).
 Say the route each score points to: 3/3 Stretch, 2/3 Core, 0–1 Support. Pupils may choose to move up.</a:t>
             </a:r>
@@ -5744,7 +5744,7 @@
                 <a:ea typeface="Calibri" pitchFamily="34" charset="-122"/>
                 <a:cs typeface="Calibri" pitchFamily="34" charset="-120"/>
               </a:rPr>
-              <a:t>The current from the battery decreases, and all the lamps get dimmer.</a:t>
+              <a:t>The current from the battery stays the same, and it is shared between three lamps.</a:t>
             </a:r>
             <a:endParaRPr lang="en-US" sz="2600" dirty="0"/>
           </a:p>
@@ -5781,7 +5781,7 @@
                 <a:ea typeface="Calibri" pitchFamily="34" charset="-122"/>
                 <a:cs typeface="Calibri" pitchFamily="34" charset="-120"/>
               </a:rPr>
-              <a:t>The current from the battery stays the same, and it is shared between three lamps.</a:t>
+              <a:t>The current from the battery increases, and the first two lamps get brighter.</a:t>
             </a:r>
             <a:endParaRPr lang="en-US" sz="2600" dirty="0"/>
           </a:p>
@@ -5818,7 +5818,7 @@
                 <a:ea typeface="Calibri" pitchFamily="34" charset="-122"/>
                 <a:cs typeface="Calibri" pitchFamily="34" charset="-120"/>
               </a:rPr>
-              <a:t>The current from the battery increases, and the first two lamps get brighter.</a:t>
+              <a:t>The current from the battery decreases, and all the lamps get dimmer.</a:t>
             </a:r>
             <a:endParaRPr lang="en-US" sz="2600" dirty="0"/>
           </a:p>
@@ -9173,7 +9173,7 @@
           <a:p>
             <a:pPr algn="l" indent="0" marL="0">
               <a:spcAft>
-                <a:spcPts val="600"/>
+                <a:spcPts val="200"/>
               </a:spcAft>
               <a:buNone/>
             </a:pPr>
@@ -9190,7 +9190,7 @@
             </a:r>
             <a:pPr algn="l" indent="0" marL="0">
               <a:spcAft>
-                <a:spcPts val="600"/>
+                <a:spcPts val="200"/>
               </a:spcAft>
               <a:buNone/>
             </a:pPr>
@@ -9203,118 +9203,118 @@
                 <a:ea typeface="Calibri" pitchFamily="34" charset="-122"/>
                 <a:cs typeface="Calibri" pitchFamily="34" charset="-120"/>
               </a:rPr>
+              <a:t>1.0 A</a:t>
+            </a:r>
+            <a:endParaRPr lang="en-US" sz="2200" dirty="0"/>
+          </a:p>
+          <a:p>
+            <a:pPr algn="l" indent="0" marL="0">
+              <a:spcAft>
+                <a:spcPts val="200"/>
+              </a:spcAft>
+              <a:buNone/>
+            </a:pPr>
+            <a:r>
+              <a:rPr lang="en-US" sz="2200" b="1" dirty="0">
+                <a:solidFill>
+                  <a:srgbClr val="B8862B"/>
+                </a:solidFill>
+                <a:latin typeface="Calibri" pitchFamily="34" charset="0"/>
+                <a:ea typeface="Calibri" pitchFamily="34" charset="-122"/>
+                <a:cs typeface="Calibri" pitchFamily="34" charset="-120"/>
+              </a:rPr>
+              <a:t>B   </a:t>
+            </a:r>
+            <a:pPr algn="l" indent="0" marL="0">
+              <a:spcAft>
+                <a:spcPts val="200"/>
+              </a:spcAft>
+              <a:buNone/>
+            </a:pPr>
+            <a:r>
+              <a:rPr lang="en-US" sz="2200" dirty="0">
+                <a:solidFill>
+                  <a:srgbClr val="1E2229"/>
+                </a:solidFill>
+                <a:latin typeface="Calibri" pitchFamily="34" charset="0"/>
+                <a:ea typeface="Calibri" pitchFamily="34" charset="-122"/>
+                <a:cs typeface="Calibri" pitchFamily="34" charset="-120"/>
+              </a:rPr>
+              <a:t>0.24 A</a:t>
+            </a:r>
+            <a:endParaRPr lang="en-US" sz="2200" dirty="0"/>
+          </a:p>
+          <a:p>
+            <a:pPr algn="l" indent="0" marL="0">
+              <a:spcAft>
+                <a:spcPts val="200"/>
+              </a:spcAft>
+              <a:buNone/>
+            </a:pPr>
+            <a:r>
+              <a:rPr lang="en-US" sz="2200" b="1" dirty="0">
+                <a:solidFill>
+                  <a:srgbClr val="B8862B"/>
+                </a:solidFill>
+                <a:latin typeface="Calibri" pitchFamily="34" charset="0"/>
+                <a:ea typeface="Calibri" pitchFamily="34" charset="-122"/>
+                <a:cs typeface="Calibri" pitchFamily="34" charset="-120"/>
+              </a:rPr>
+              <a:t>C   </a:t>
+            </a:r>
+            <a:pPr algn="l" indent="0" marL="0">
+              <a:spcAft>
+                <a:spcPts val="200"/>
+              </a:spcAft>
+              <a:buNone/>
+            </a:pPr>
+            <a:r>
+              <a:rPr lang="en-US" sz="2200" dirty="0">
+                <a:solidFill>
+                  <a:srgbClr val="1E2229"/>
+                </a:solidFill>
+                <a:latin typeface="Calibri" pitchFamily="34" charset="0"/>
+                <a:ea typeface="Calibri" pitchFamily="34" charset="-122"/>
+                <a:cs typeface="Calibri" pitchFamily="34" charset="-120"/>
+              </a:rPr>
+              <a:t>0.50 A</a:t>
+            </a:r>
+            <a:endParaRPr lang="en-US" sz="2200" dirty="0"/>
+          </a:p>
+          <a:p>
+            <a:pPr algn="l" indent="0" marL="0">
+              <a:spcAft>
+                <a:spcPts val="200"/>
+              </a:spcAft>
+              <a:buNone/>
+            </a:pPr>
+            <a:r>
+              <a:rPr lang="en-US" sz="2200" b="1" dirty="0">
+                <a:solidFill>
+                  <a:srgbClr val="B8862B"/>
+                </a:solidFill>
+                <a:latin typeface="Calibri" pitchFamily="34" charset="0"/>
+                <a:ea typeface="Calibri" pitchFamily="34" charset="-122"/>
+                <a:cs typeface="Calibri" pitchFamily="34" charset="-120"/>
+              </a:rPr>
+              <a:t>D   </a:t>
+            </a:r>
+            <a:pPr algn="l" indent="0" marL="0">
+              <a:spcAft>
+                <a:spcPts val="200"/>
+              </a:spcAft>
+              <a:buNone/>
+            </a:pPr>
+            <a:r>
+              <a:rPr lang="en-US" sz="2200" dirty="0">
+                <a:solidFill>
+                  <a:srgbClr val="1E2229"/>
+                </a:solidFill>
+                <a:latin typeface="Calibri" pitchFamily="34" charset="0"/>
+                <a:ea typeface="Calibri" pitchFamily="34" charset="-122"/>
+                <a:cs typeface="Calibri" pitchFamily="34" charset="-120"/>
+              </a:rPr>
               <a:t>0.20 A</a:t>
-            </a:r>
-            <a:endParaRPr lang="en-US" sz="2200" dirty="0"/>
-          </a:p>
-          <a:p>
-            <a:pPr algn="l" indent="0" marL="0">
-              <a:spcAft>
-                <a:spcPts val="600"/>
-              </a:spcAft>
-              <a:buNone/>
-            </a:pPr>
-            <a:r>
-              <a:rPr lang="en-US" sz="2200" b="1" dirty="0">
-                <a:solidFill>
-                  <a:srgbClr val="B8862B"/>
-                </a:solidFill>
-                <a:latin typeface="Calibri" pitchFamily="34" charset="0"/>
-                <a:ea typeface="Calibri" pitchFamily="34" charset="-122"/>
-                <a:cs typeface="Calibri" pitchFamily="34" charset="-120"/>
-              </a:rPr>
-              <a:t>B   </a:t>
-            </a:r>
-            <a:pPr algn="l" indent="0" marL="0">
-              <a:spcAft>
-                <a:spcPts val="600"/>
-              </a:spcAft>
-              <a:buNone/>
-            </a:pPr>
-            <a:r>
-              <a:rPr lang="en-US" sz="2200" dirty="0">
-                <a:solidFill>
-                  <a:srgbClr val="1E2229"/>
-                </a:solidFill>
-                <a:latin typeface="Calibri" pitchFamily="34" charset="0"/>
-                <a:ea typeface="Calibri" pitchFamily="34" charset="-122"/>
-                <a:cs typeface="Calibri" pitchFamily="34" charset="-120"/>
-              </a:rPr>
-              <a:t>0.24 A</a:t>
-            </a:r>
-            <a:endParaRPr lang="en-US" sz="2200" dirty="0"/>
-          </a:p>
-          <a:p>
-            <a:pPr algn="l" indent="0" marL="0">
-              <a:spcAft>
-                <a:spcPts val="600"/>
-              </a:spcAft>
-              <a:buNone/>
-            </a:pPr>
-            <a:r>
-              <a:rPr lang="en-US" sz="2200" b="1" dirty="0">
-                <a:solidFill>
-                  <a:srgbClr val="B8862B"/>
-                </a:solidFill>
-                <a:latin typeface="Calibri" pitchFamily="34" charset="0"/>
-                <a:ea typeface="Calibri" pitchFamily="34" charset="-122"/>
-                <a:cs typeface="Calibri" pitchFamily="34" charset="-120"/>
-              </a:rPr>
-              <a:t>C   </a:t>
-            </a:r>
-            <a:pPr algn="l" indent="0" marL="0">
-              <a:spcAft>
-                <a:spcPts val="600"/>
-              </a:spcAft>
-              <a:buNone/>
-            </a:pPr>
-            <a:r>
-              <a:rPr lang="en-US" sz="2200" dirty="0">
-                <a:solidFill>
-                  <a:srgbClr val="1E2229"/>
-                </a:solidFill>
-                <a:latin typeface="Calibri" pitchFamily="34" charset="0"/>
-                <a:ea typeface="Calibri" pitchFamily="34" charset="-122"/>
-                <a:cs typeface="Calibri" pitchFamily="34" charset="-120"/>
-              </a:rPr>
-              <a:t>1.0 A</a:t>
-            </a:r>
-            <a:endParaRPr lang="en-US" sz="2200" dirty="0"/>
-          </a:p>
-          <a:p>
-            <a:pPr algn="l" indent="0" marL="0">
-              <a:spcAft>
-                <a:spcPts val="600"/>
-              </a:spcAft>
-              <a:buNone/>
-            </a:pPr>
-            <a:r>
-              <a:rPr lang="en-US" sz="2200" b="1" dirty="0">
-                <a:solidFill>
-                  <a:srgbClr val="B8862B"/>
-                </a:solidFill>
-                <a:latin typeface="Calibri" pitchFamily="34" charset="0"/>
-                <a:ea typeface="Calibri" pitchFamily="34" charset="-122"/>
-                <a:cs typeface="Calibri" pitchFamily="34" charset="-120"/>
-              </a:rPr>
-              <a:t>D   </a:t>
-            </a:r>
-            <a:pPr algn="l" indent="0" marL="0">
-              <a:spcAft>
-                <a:spcPts val="600"/>
-              </a:spcAft>
-              <a:buNone/>
-            </a:pPr>
-            <a:r>
-              <a:rPr lang="en-US" sz="2200" dirty="0">
-                <a:solidFill>
-                  <a:srgbClr val="1E2229"/>
-                </a:solidFill>
-                <a:latin typeface="Calibri" pitchFamily="34" charset="0"/>
-                <a:ea typeface="Calibri" pitchFamily="34" charset="-122"/>
-                <a:cs typeface="Calibri" pitchFamily="34" charset="-120"/>
-              </a:rPr>
-              <a:t>0.50 A</a:t>
             </a:r>
             <a:endParaRPr lang="en-US" sz="2200" dirty="0"/>
           </a:p>
@@ -10163,7 +10163,7 @@
                 <a:ea typeface="Calibri" pitchFamily="34" charset="-122"/>
                 <a:cs typeface="Calibri" pitchFamily="34" charset="-120"/>
               </a:rPr>
-              <a:t>C   1.0 A</a:t>
+              <a:t>A   1.0 A</a:t>
             </a:r>
             <a:endParaRPr lang="en-US" sz="2200" dirty="0"/>
           </a:p>

--- a/decks/combined-circuits/combined-circuits_ch6_parallel-circuits.pptx
+++ b/decks/combined-circuits/combined-circuits_ch6_parallel-circuits.pptx
@@ -123,28 +123,28 @@
   <p:extLst>
     <p:ext uri="{521415D9-36F7-43E2-AB2F-B90AF26B5E84}">
       <p14:sectionLst xmlns:p14="http://schemas.microsoft.com/office/powerpoint/2010/main">
-        <p14:section name="Opening" id="{50d74aec-602d-99d5-8f46-a721eed23119}">
+        <p14:section name="Opening" id="{a35d9ba6-7db8-4f5b-5d57-a3deb19c6f58}">
           <p14:sldIdLst>
             <p14:sldId id="256"/>
           </p14:sldIdLst>
         </p14:section>
-        <p14:section name="Gate" id="{196e1b22-1a08-4535-1387-777f16868145}">
+        <p14:section name="Gate" id="{bbd26169-081e-bd3f-117b-9e1c31c14a0d}">
           <p14:sldIdLst>
             <p14:sldId id="257"/>
             <p14:sldId id="258"/>
           </p14:sldIdLst>
         </p14:section>
-        <p14:section name="Pre-teach" id="{4cc60b88-aaac-f09e-2b97-e6a4b8c7507b}">
+        <p14:section name="Pre-teach" id="{25ae62bb-8674-fe6c-eb4c-9a2b90d74e85}">
           <p14:sldIdLst>
             <p14:sldId id="259"/>
           </p14:sldIdLst>
         </p14:section>
-        <p14:section name="Read-along" id="{8f15987a-bd58-b2c5-e21e-fb204302967e}">
+        <p14:section name="Read-along" id="{50010da0-d15f-1498-1627-a177fba4fea1}">
           <p14:sldIdLst>
             <p14:sldId id="260"/>
           </p14:sldIdLst>
         </p14:section>
-        <p14:section name="Teach" id="{f37a4cd4-f380-eda4-f2ca-a458c7e4701f}">
+        <p14:section name="Teach" id="{e8c27984-dc6e-d0a5-4a56-b4f23ae64b7c}">
           <p14:sldIdLst>
             <p14:sldId id="261"/>
             <p14:sldId id="262"/>
@@ -153,19 +153,19 @@
             <p14:sldId id="265"/>
           </p14:sldIdLst>
         </p14:section>
-        <p14:section name="Routes" id="{56a3c79a-103d-bad3-635a-6dc3f53874e6}">
+        <p14:section name="Routes" id="{944a423b-488a-9ef5-72b5-87e3dcc82fc8}">
           <p14:sldIdLst>
             <p14:sldId id="266"/>
             <p14:sldId id="267"/>
             <p14:sldId id="268"/>
           </p14:sldIdLst>
         </p14:section>
-        <p14:section name="Close" id="{c7797d37-15fc-1927-d26a-e563046a2f47}">
+        <p14:section name="Close" id="{8f34c1fa-746c-b55b-f1be-1008b6a9111d}">
           <p14:sldIdLst>
             <p14:sldId id="269"/>
           </p14:sldIdLst>
         </p14:section>
-        <p14:section name="Answers" id="{420c60cb-2a5f-52c8-bb0e-8fc515b3d848}">
+        <p14:section name="Answers" id="{9a6b2d58-bb5b-8bd3-4787-2fc7f417f8fa}">
           <p14:sldIdLst>
             <p14:sldId id="270"/>
             <p14:sldId id="271"/>
